--- a/最知心的朋友.pptx
+++ b/最知心的朋友.pptx
@@ -5,10 +5,15 @@
     <p:sldMasterId id="2147483660" r:id="rId1"/>
   </p:sldMasterIdLst>
   <p:sldIdLst>
-    <p:sldId id="257" r:id="rId2"/>
-    <p:sldId id="258" r:id="rId3"/>
-    <p:sldId id="259" r:id="rId4"/>
-    <p:sldId id="260" r:id="rId5"/>
+    <p:sldId id="633" r:id="rId2"/>
+    <p:sldId id="634" r:id="rId3"/>
+    <p:sldId id="635" r:id="rId4"/>
+    <p:sldId id="636" r:id="rId5"/>
+    <p:sldId id="637" r:id="rId6"/>
+    <p:sldId id="638" r:id="rId7"/>
+    <p:sldId id="639" r:id="rId8"/>
+    <p:sldId id="640" r:id="rId9"/>
+    <p:sldId id="641" r:id="rId10"/>
   </p:sldIdLst>
   <p:sldSz cx="9144000" cy="5143500" type="screen16x9"/>
   <p:notesSz cx="6858000" cy="9144000"/>
@@ -164,7 +169,7 @@
           <a:lstStyle/>
           <a:p>
             <a:r>
-              <a:rPr lang="en-US" altLang="zh-TW" smtClean="0"/>
+              <a:rPr lang="en-US" altLang="zh-TW"/>
               <a:t>Click to edit Master title style</a:t>
             </a:r>
             <a:endParaRPr lang="zh-TW" altLang="en-US"/>
@@ -283,7 +288,7 @@
           </a:lstStyle>
           <a:p>
             <a:r>
-              <a:rPr lang="en-US" altLang="zh-TW" smtClean="0"/>
+              <a:rPr lang="en-US" altLang="zh-TW"/>
               <a:t>Click to edit Master subtitle style</a:t>
             </a:r>
             <a:endParaRPr lang="zh-TW" altLang="en-US"/>
@@ -307,7 +312,7 @@
           <a:p>
             <a:fld id="{289A9120-AE54-4763-9812-197ED380588B}" type="datetimeFigureOut">
               <a:rPr lang="en-US" smtClean="0"/>
-              <a:t>8/12/2023</a:t>
+              <a:t>7/13/2024</a:t>
             </a:fld>
             <a:endParaRPr lang="en-US"/>
           </a:p>
@@ -396,7 +401,7 @@
           <a:lstStyle/>
           <a:p>
             <a:r>
-              <a:rPr lang="en-US" altLang="zh-TW" smtClean="0"/>
+              <a:rPr lang="en-US" altLang="zh-TW"/>
               <a:t>Click to edit Master title style</a:t>
             </a:r>
             <a:endParaRPr lang="zh-TW" altLang="en-US"/>
@@ -420,35 +425,35 @@
           <a:p>
             <a:pPr lvl="0"/>
             <a:r>
-              <a:rPr lang="en-US" altLang="zh-TW" smtClean="0"/>
+              <a:rPr lang="en-US" altLang="zh-TW"/>
               <a:t>Click to edit Master text styles</a:t>
             </a:r>
           </a:p>
           <a:p>
             <a:pPr lvl="1"/>
             <a:r>
-              <a:rPr lang="en-US" altLang="zh-TW" smtClean="0"/>
+              <a:rPr lang="en-US" altLang="zh-TW"/>
               <a:t>Second level</a:t>
             </a:r>
           </a:p>
           <a:p>
             <a:pPr lvl="2"/>
             <a:r>
-              <a:rPr lang="en-US" altLang="zh-TW" smtClean="0"/>
+              <a:rPr lang="en-US" altLang="zh-TW"/>
               <a:t>Third level</a:t>
             </a:r>
           </a:p>
           <a:p>
             <a:pPr lvl="3"/>
             <a:r>
-              <a:rPr lang="en-US" altLang="zh-TW" smtClean="0"/>
+              <a:rPr lang="en-US" altLang="zh-TW"/>
               <a:t>Fourth level</a:t>
             </a:r>
           </a:p>
           <a:p>
             <a:pPr lvl="4"/>
             <a:r>
-              <a:rPr lang="en-US" altLang="zh-TW" smtClean="0"/>
+              <a:rPr lang="en-US" altLang="zh-TW"/>
               <a:t>Fifth level</a:t>
             </a:r>
             <a:endParaRPr lang="zh-TW" altLang="en-US"/>
@@ -472,7 +477,7 @@
           <a:p>
             <a:fld id="{289A9120-AE54-4763-9812-197ED380588B}" type="datetimeFigureOut">
               <a:rPr lang="en-US" smtClean="0"/>
-              <a:t>8/12/2023</a:t>
+              <a:t>7/13/2024</a:t>
             </a:fld>
             <a:endParaRPr lang="en-US"/>
           </a:p>
@@ -566,7 +571,7 @@
           <a:lstStyle/>
           <a:p>
             <a:r>
-              <a:rPr lang="en-US" altLang="zh-TW" smtClean="0"/>
+              <a:rPr lang="en-US" altLang="zh-TW"/>
               <a:t>Click to edit Master title style</a:t>
             </a:r>
             <a:endParaRPr lang="zh-TW" altLang="en-US"/>
@@ -595,35 +600,35 @@
           <a:p>
             <a:pPr lvl="0"/>
             <a:r>
-              <a:rPr lang="en-US" altLang="zh-TW" smtClean="0"/>
+              <a:rPr lang="en-US" altLang="zh-TW"/>
               <a:t>Click to edit Master text styles</a:t>
             </a:r>
           </a:p>
           <a:p>
             <a:pPr lvl="1"/>
             <a:r>
-              <a:rPr lang="en-US" altLang="zh-TW" smtClean="0"/>
+              <a:rPr lang="en-US" altLang="zh-TW"/>
               <a:t>Second level</a:t>
             </a:r>
           </a:p>
           <a:p>
             <a:pPr lvl="2"/>
             <a:r>
-              <a:rPr lang="en-US" altLang="zh-TW" smtClean="0"/>
+              <a:rPr lang="en-US" altLang="zh-TW"/>
               <a:t>Third level</a:t>
             </a:r>
           </a:p>
           <a:p>
             <a:pPr lvl="3"/>
             <a:r>
-              <a:rPr lang="en-US" altLang="zh-TW" smtClean="0"/>
+              <a:rPr lang="en-US" altLang="zh-TW"/>
               <a:t>Fourth level</a:t>
             </a:r>
           </a:p>
           <a:p>
             <a:pPr lvl="4"/>
             <a:r>
-              <a:rPr lang="en-US" altLang="zh-TW" smtClean="0"/>
+              <a:rPr lang="en-US" altLang="zh-TW"/>
               <a:t>Fifth level</a:t>
             </a:r>
             <a:endParaRPr lang="zh-TW" altLang="en-US"/>
@@ -647,7 +652,7 @@
           <a:p>
             <a:fld id="{289A9120-AE54-4763-9812-197ED380588B}" type="datetimeFigureOut">
               <a:rPr lang="en-US" smtClean="0"/>
-              <a:t>8/12/2023</a:t>
+              <a:t>7/13/2024</a:t>
             </a:fld>
             <a:endParaRPr lang="en-US"/>
           </a:p>
@@ -736,7 +741,7 @@
           <a:lstStyle/>
           <a:p>
             <a:r>
-              <a:rPr lang="en-US" altLang="zh-TW" smtClean="0"/>
+              <a:rPr lang="en-US" altLang="zh-TW"/>
               <a:t>Click to edit Master title style</a:t>
             </a:r>
             <a:endParaRPr lang="zh-TW" altLang="en-US"/>
@@ -760,35 +765,35 @@
           <a:p>
             <a:pPr lvl="0"/>
             <a:r>
-              <a:rPr lang="en-US" altLang="zh-TW" smtClean="0"/>
+              <a:rPr lang="en-US" altLang="zh-TW"/>
               <a:t>Click to edit Master text styles</a:t>
             </a:r>
           </a:p>
           <a:p>
             <a:pPr lvl="1"/>
             <a:r>
-              <a:rPr lang="en-US" altLang="zh-TW" smtClean="0"/>
+              <a:rPr lang="en-US" altLang="zh-TW"/>
               <a:t>Second level</a:t>
             </a:r>
           </a:p>
           <a:p>
             <a:pPr lvl="2"/>
             <a:r>
-              <a:rPr lang="en-US" altLang="zh-TW" smtClean="0"/>
+              <a:rPr lang="en-US" altLang="zh-TW"/>
               <a:t>Third level</a:t>
             </a:r>
           </a:p>
           <a:p>
             <a:pPr lvl="3"/>
             <a:r>
-              <a:rPr lang="en-US" altLang="zh-TW" smtClean="0"/>
+              <a:rPr lang="en-US" altLang="zh-TW"/>
               <a:t>Fourth level</a:t>
             </a:r>
           </a:p>
           <a:p>
             <a:pPr lvl="4"/>
             <a:r>
-              <a:rPr lang="en-US" altLang="zh-TW" smtClean="0"/>
+              <a:rPr lang="en-US" altLang="zh-TW"/>
               <a:t>Fifth level</a:t>
             </a:r>
             <a:endParaRPr lang="zh-TW" altLang="en-US"/>
@@ -812,7 +817,7 @@
           <a:p>
             <a:fld id="{289A9120-AE54-4763-9812-197ED380588B}" type="datetimeFigureOut">
               <a:rPr lang="en-US" smtClean="0"/>
-              <a:t>8/12/2023</a:t>
+              <a:t>7/13/2024</a:t>
             </a:fld>
             <a:endParaRPr lang="en-US"/>
           </a:p>
@@ -910,7 +915,7 @@
           </a:lstStyle>
           <a:p>
             <a:r>
-              <a:rPr lang="en-US" altLang="zh-TW" smtClean="0"/>
+              <a:rPr lang="en-US" altLang="zh-TW"/>
               <a:t>Click to edit Master title style</a:t>
             </a:r>
             <a:endParaRPr lang="zh-TW" altLang="en-US"/>
@@ -1030,7 +1035,7 @@
           <a:p>
             <a:pPr lvl="0"/>
             <a:r>
-              <a:rPr lang="en-US" altLang="zh-TW" smtClean="0"/>
+              <a:rPr lang="en-US" altLang="zh-TW"/>
               <a:t>Click to edit Master text styles</a:t>
             </a:r>
           </a:p>
@@ -1053,7 +1058,7 @@
           <a:p>
             <a:fld id="{289A9120-AE54-4763-9812-197ED380588B}" type="datetimeFigureOut">
               <a:rPr lang="en-US" smtClean="0"/>
-              <a:t>8/12/2023</a:t>
+              <a:t>7/13/2024</a:t>
             </a:fld>
             <a:endParaRPr lang="en-US"/>
           </a:p>
@@ -1142,7 +1147,7 @@
           <a:lstStyle/>
           <a:p>
             <a:r>
-              <a:rPr lang="en-US" altLang="zh-TW" smtClean="0"/>
+              <a:rPr lang="en-US" altLang="zh-TW"/>
               <a:t>Click to edit Master title style</a:t>
             </a:r>
             <a:endParaRPr lang="zh-TW" altLang="en-US"/>
@@ -1199,35 +1204,35 @@
           <a:p>
             <a:pPr lvl="0"/>
             <a:r>
-              <a:rPr lang="en-US" altLang="zh-TW" smtClean="0"/>
+              <a:rPr lang="en-US" altLang="zh-TW"/>
               <a:t>Click to edit Master text styles</a:t>
             </a:r>
           </a:p>
           <a:p>
             <a:pPr lvl="1"/>
             <a:r>
-              <a:rPr lang="en-US" altLang="zh-TW" smtClean="0"/>
+              <a:rPr lang="en-US" altLang="zh-TW"/>
               <a:t>Second level</a:t>
             </a:r>
           </a:p>
           <a:p>
             <a:pPr lvl="2"/>
             <a:r>
-              <a:rPr lang="en-US" altLang="zh-TW" smtClean="0"/>
+              <a:rPr lang="en-US" altLang="zh-TW"/>
               <a:t>Third level</a:t>
             </a:r>
           </a:p>
           <a:p>
             <a:pPr lvl="3"/>
             <a:r>
-              <a:rPr lang="en-US" altLang="zh-TW" smtClean="0"/>
+              <a:rPr lang="en-US" altLang="zh-TW"/>
               <a:t>Fourth level</a:t>
             </a:r>
           </a:p>
           <a:p>
             <a:pPr lvl="4"/>
             <a:r>
-              <a:rPr lang="en-US" altLang="zh-TW" smtClean="0"/>
+              <a:rPr lang="en-US" altLang="zh-TW"/>
               <a:t>Fifth level</a:t>
             </a:r>
             <a:endParaRPr lang="zh-TW" altLang="en-US"/>
@@ -1284,35 +1289,35 @@
           <a:p>
             <a:pPr lvl="0"/>
             <a:r>
-              <a:rPr lang="en-US" altLang="zh-TW" smtClean="0"/>
+              <a:rPr lang="en-US" altLang="zh-TW"/>
               <a:t>Click to edit Master text styles</a:t>
             </a:r>
           </a:p>
           <a:p>
             <a:pPr lvl="1"/>
             <a:r>
-              <a:rPr lang="en-US" altLang="zh-TW" smtClean="0"/>
+              <a:rPr lang="en-US" altLang="zh-TW"/>
               <a:t>Second level</a:t>
             </a:r>
           </a:p>
           <a:p>
             <a:pPr lvl="2"/>
             <a:r>
-              <a:rPr lang="en-US" altLang="zh-TW" smtClean="0"/>
+              <a:rPr lang="en-US" altLang="zh-TW"/>
               <a:t>Third level</a:t>
             </a:r>
           </a:p>
           <a:p>
             <a:pPr lvl="3"/>
             <a:r>
-              <a:rPr lang="en-US" altLang="zh-TW" smtClean="0"/>
+              <a:rPr lang="en-US" altLang="zh-TW"/>
               <a:t>Fourth level</a:t>
             </a:r>
           </a:p>
           <a:p>
             <a:pPr lvl="4"/>
             <a:r>
-              <a:rPr lang="en-US" altLang="zh-TW" smtClean="0"/>
+              <a:rPr lang="en-US" altLang="zh-TW"/>
               <a:t>Fifth level</a:t>
             </a:r>
             <a:endParaRPr lang="zh-TW" altLang="en-US"/>
@@ -1336,7 +1341,7 @@
           <a:p>
             <a:fld id="{289A9120-AE54-4763-9812-197ED380588B}" type="datetimeFigureOut">
               <a:rPr lang="en-US" smtClean="0"/>
-              <a:t>8/12/2023</a:t>
+              <a:t>7/13/2024</a:t>
             </a:fld>
             <a:endParaRPr lang="en-US"/>
           </a:p>
@@ -1429,7 +1434,7 @@
           </a:lstStyle>
           <a:p>
             <a:r>
-              <a:rPr lang="en-US" altLang="zh-TW" smtClean="0"/>
+              <a:rPr lang="en-US" altLang="zh-TW"/>
               <a:t>Click to edit Master title style</a:t>
             </a:r>
             <a:endParaRPr lang="zh-TW" altLang="en-US"/>
@@ -1495,7 +1500,7 @@
           <a:p>
             <a:pPr lvl="0"/>
             <a:r>
-              <a:rPr lang="en-US" altLang="zh-TW" smtClean="0"/>
+              <a:rPr lang="en-US" altLang="zh-TW"/>
               <a:t>Click to edit Master text styles</a:t>
             </a:r>
           </a:p>
@@ -1551,35 +1556,35 @@
           <a:p>
             <a:pPr lvl="0"/>
             <a:r>
-              <a:rPr lang="en-US" altLang="zh-TW" smtClean="0"/>
+              <a:rPr lang="en-US" altLang="zh-TW"/>
               <a:t>Click to edit Master text styles</a:t>
             </a:r>
           </a:p>
           <a:p>
             <a:pPr lvl="1"/>
             <a:r>
-              <a:rPr lang="en-US" altLang="zh-TW" smtClean="0"/>
+              <a:rPr lang="en-US" altLang="zh-TW"/>
               <a:t>Second level</a:t>
             </a:r>
           </a:p>
           <a:p>
             <a:pPr lvl="2"/>
             <a:r>
-              <a:rPr lang="en-US" altLang="zh-TW" smtClean="0"/>
+              <a:rPr lang="en-US" altLang="zh-TW"/>
               <a:t>Third level</a:t>
             </a:r>
           </a:p>
           <a:p>
             <a:pPr lvl="3"/>
             <a:r>
-              <a:rPr lang="en-US" altLang="zh-TW" smtClean="0"/>
+              <a:rPr lang="en-US" altLang="zh-TW"/>
               <a:t>Fourth level</a:t>
             </a:r>
           </a:p>
           <a:p>
             <a:pPr lvl="4"/>
             <a:r>
-              <a:rPr lang="en-US" altLang="zh-TW" smtClean="0"/>
+              <a:rPr lang="en-US" altLang="zh-TW"/>
               <a:t>Fifth level</a:t>
             </a:r>
             <a:endParaRPr lang="zh-TW" altLang="en-US"/>
@@ -1645,7 +1650,7 @@
           <a:p>
             <a:pPr lvl="0"/>
             <a:r>
-              <a:rPr lang="en-US" altLang="zh-TW" smtClean="0"/>
+              <a:rPr lang="en-US" altLang="zh-TW"/>
               <a:t>Click to edit Master text styles</a:t>
             </a:r>
           </a:p>
@@ -1701,35 +1706,35 @@
           <a:p>
             <a:pPr lvl="0"/>
             <a:r>
-              <a:rPr lang="en-US" altLang="zh-TW" smtClean="0"/>
+              <a:rPr lang="en-US" altLang="zh-TW"/>
               <a:t>Click to edit Master text styles</a:t>
             </a:r>
           </a:p>
           <a:p>
             <a:pPr lvl="1"/>
             <a:r>
-              <a:rPr lang="en-US" altLang="zh-TW" smtClean="0"/>
+              <a:rPr lang="en-US" altLang="zh-TW"/>
               <a:t>Second level</a:t>
             </a:r>
           </a:p>
           <a:p>
             <a:pPr lvl="2"/>
             <a:r>
-              <a:rPr lang="en-US" altLang="zh-TW" smtClean="0"/>
+              <a:rPr lang="en-US" altLang="zh-TW"/>
               <a:t>Third level</a:t>
             </a:r>
           </a:p>
           <a:p>
             <a:pPr lvl="3"/>
             <a:r>
-              <a:rPr lang="en-US" altLang="zh-TW" smtClean="0"/>
+              <a:rPr lang="en-US" altLang="zh-TW"/>
               <a:t>Fourth level</a:t>
             </a:r>
           </a:p>
           <a:p>
             <a:pPr lvl="4"/>
             <a:r>
-              <a:rPr lang="en-US" altLang="zh-TW" smtClean="0"/>
+              <a:rPr lang="en-US" altLang="zh-TW"/>
               <a:t>Fifth level</a:t>
             </a:r>
             <a:endParaRPr lang="zh-TW" altLang="en-US"/>
@@ -1753,7 +1758,7 @@
           <a:p>
             <a:fld id="{289A9120-AE54-4763-9812-197ED380588B}" type="datetimeFigureOut">
               <a:rPr lang="en-US" smtClean="0"/>
-              <a:t>8/12/2023</a:t>
+              <a:t>7/13/2024</a:t>
             </a:fld>
             <a:endParaRPr lang="en-US"/>
           </a:p>
@@ -1842,7 +1847,7 @@
           <a:lstStyle/>
           <a:p>
             <a:r>
-              <a:rPr lang="en-US" altLang="zh-TW" smtClean="0"/>
+              <a:rPr lang="en-US" altLang="zh-TW"/>
               <a:t>Click to edit Master title style</a:t>
             </a:r>
             <a:endParaRPr lang="zh-TW" altLang="en-US"/>
@@ -1866,7 +1871,7 @@
           <a:p>
             <a:fld id="{289A9120-AE54-4763-9812-197ED380588B}" type="datetimeFigureOut">
               <a:rPr lang="en-US" smtClean="0"/>
-              <a:t>8/12/2023</a:t>
+              <a:t>7/13/2024</a:t>
             </a:fld>
             <a:endParaRPr lang="en-US"/>
           </a:p>
@@ -1956,7 +1961,7 @@
           <a:p>
             <a:fld id="{289A9120-AE54-4763-9812-197ED380588B}" type="datetimeFigureOut">
               <a:rPr lang="en-US" smtClean="0"/>
-              <a:t>8/12/2023</a:t>
+              <a:t>7/13/2024</a:t>
             </a:fld>
             <a:endParaRPr lang="en-US"/>
           </a:p>
@@ -2054,7 +2059,7 @@
           </a:lstStyle>
           <a:p>
             <a:r>
-              <a:rPr lang="en-US" altLang="zh-TW" smtClean="0"/>
+              <a:rPr lang="en-US" altLang="zh-TW"/>
               <a:t>Click to edit Master title style</a:t>
             </a:r>
             <a:endParaRPr lang="zh-TW" altLang="en-US"/>
@@ -2111,35 +2116,35 @@
           <a:p>
             <a:pPr lvl="0"/>
             <a:r>
-              <a:rPr lang="en-US" altLang="zh-TW" smtClean="0"/>
+              <a:rPr lang="en-US" altLang="zh-TW"/>
               <a:t>Click to edit Master text styles</a:t>
             </a:r>
           </a:p>
           <a:p>
             <a:pPr lvl="1"/>
             <a:r>
-              <a:rPr lang="en-US" altLang="zh-TW" smtClean="0"/>
+              <a:rPr lang="en-US" altLang="zh-TW"/>
               <a:t>Second level</a:t>
             </a:r>
           </a:p>
           <a:p>
             <a:pPr lvl="2"/>
             <a:r>
-              <a:rPr lang="en-US" altLang="zh-TW" smtClean="0"/>
+              <a:rPr lang="en-US" altLang="zh-TW"/>
               <a:t>Third level</a:t>
             </a:r>
           </a:p>
           <a:p>
             <a:pPr lvl="3"/>
             <a:r>
-              <a:rPr lang="en-US" altLang="zh-TW" smtClean="0"/>
+              <a:rPr lang="en-US" altLang="zh-TW"/>
               <a:t>Fourth level</a:t>
             </a:r>
           </a:p>
           <a:p>
             <a:pPr lvl="4"/>
             <a:r>
-              <a:rPr lang="en-US" altLang="zh-TW" smtClean="0"/>
+              <a:rPr lang="en-US" altLang="zh-TW"/>
               <a:t>Fifth level</a:t>
             </a:r>
             <a:endParaRPr lang="zh-TW" altLang="en-US"/>
@@ -2205,7 +2210,7 @@
           <a:p>
             <a:pPr lvl="0"/>
             <a:r>
-              <a:rPr lang="en-US" altLang="zh-TW" smtClean="0"/>
+              <a:rPr lang="en-US" altLang="zh-TW"/>
               <a:t>Click to edit Master text styles</a:t>
             </a:r>
           </a:p>
@@ -2228,7 +2233,7 @@
           <a:p>
             <a:fld id="{289A9120-AE54-4763-9812-197ED380588B}" type="datetimeFigureOut">
               <a:rPr lang="en-US" smtClean="0"/>
-              <a:t>8/12/2023</a:t>
+              <a:t>7/13/2024</a:t>
             </a:fld>
             <a:endParaRPr lang="en-US"/>
           </a:p>
@@ -2326,7 +2331,7 @@
           </a:lstStyle>
           <a:p>
             <a:r>
-              <a:rPr lang="en-US" altLang="zh-TW" smtClean="0"/>
+              <a:rPr lang="en-US" altLang="zh-TW"/>
               <a:t>Click to edit Master title style</a:t>
             </a:r>
             <a:endParaRPr lang="zh-TW" altLang="en-US"/>
@@ -2391,7 +2396,7 @@
           </a:lstStyle>
           <a:p>
             <a:r>
-              <a:rPr lang="en-US" altLang="zh-TW" smtClean="0"/>
+              <a:rPr lang="en-US" altLang="zh-TW"/>
               <a:t>Click icon to add picture</a:t>
             </a:r>
             <a:endParaRPr lang="zh-TW" altLang="en-US"/>
@@ -2457,7 +2462,7 @@
           <a:p>
             <a:pPr lvl="0"/>
             <a:r>
-              <a:rPr lang="en-US" altLang="zh-TW" smtClean="0"/>
+              <a:rPr lang="en-US" altLang="zh-TW"/>
               <a:t>Click to edit Master text styles</a:t>
             </a:r>
           </a:p>
@@ -2480,7 +2485,7 @@
           <a:p>
             <a:fld id="{289A9120-AE54-4763-9812-197ED380588B}" type="datetimeFigureOut">
               <a:rPr lang="en-US" smtClean="0"/>
-              <a:t>8/12/2023</a:t>
+              <a:t>7/13/2024</a:t>
             </a:fld>
             <a:endParaRPr lang="en-US"/>
           </a:p>
@@ -2589,10 +2594,9 @@
           <a:lstStyle/>
           <a:p>
             <a:r>
-              <a:rPr lang="zh-TW" altLang="en-US" smtClean="0"/>
+              <a:rPr lang="zh-TW" altLang="en-US"/>
               <a:t>按一下以編輯母片標題樣式</a:t>
             </a:r>
-            <a:endParaRPr lang="zh-TW" altLang="en-US"/>
           </a:p>
         </p:txBody>
       </p:sp>
@@ -2623,38 +2627,37 @@
           <a:p>
             <a:pPr lvl="0"/>
             <a:r>
-              <a:rPr lang="zh-TW" altLang="en-US" smtClean="0"/>
+              <a:rPr lang="zh-TW" altLang="en-US"/>
               <a:t>按一下以編輯母片文字樣式</a:t>
             </a:r>
           </a:p>
           <a:p>
             <a:pPr lvl="1"/>
             <a:r>
-              <a:rPr lang="zh-TW" altLang="en-US" smtClean="0"/>
+              <a:rPr lang="zh-TW" altLang="en-US"/>
               <a:t>第二層</a:t>
             </a:r>
           </a:p>
           <a:p>
             <a:pPr lvl="2"/>
             <a:r>
-              <a:rPr lang="zh-TW" altLang="en-US" smtClean="0"/>
+              <a:rPr lang="zh-TW" altLang="en-US"/>
               <a:t>第三層</a:t>
             </a:r>
           </a:p>
           <a:p>
             <a:pPr lvl="3"/>
             <a:r>
-              <a:rPr lang="zh-TW" altLang="en-US" smtClean="0"/>
+              <a:rPr lang="zh-TW" altLang="en-US"/>
               <a:t>第四層</a:t>
             </a:r>
           </a:p>
           <a:p>
             <a:pPr lvl="4"/>
             <a:r>
-              <a:rPr lang="zh-TW" altLang="en-US" smtClean="0"/>
+              <a:rPr lang="zh-TW" altLang="en-US"/>
               <a:t>第五層</a:t>
             </a:r>
-            <a:endParaRPr lang="zh-TW" altLang="en-US"/>
           </a:p>
         </p:txBody>
       </p:sp>
@@ -2693,7 +2696,7 @@
           <a:p>
             <a:fld id="{289A9120-AE54-4763-9812-197ED380588B}" type="datetimeFigureOut">
               <a:rPr lang="en-US" smtClean="0"/>
-              <a:t>8/12/2023</a:t>
+              <a:t>7/13/2024</a:t>
             </a:fld>
             <a:endParaRPr lang="en-US"/>
           </a:p>
@@ -3065,7 +3068,7 @@
       </p:grpSpPr>
       <p:sp>
         <p:nvSpPr>
-          <p:cNvPr id="2" name="Title 1"/>
+          <p:cNvPr id="4" name="標題 3"/>
           <p:cNvSpPr>
             <a:spLocks noGrp="1"/>
           </p:cNvSpPr>
@@ -3073,150 +3076,39 @@
             <p:ph type="title"/>
           </p:nvPr>
         </p:nvSpPr>
-        <p:spPr/>
-        <p:txBody>
-          <a:bodyPr>
-            <a:normAutofit/>
-          </a:bodyPr>
-          <a:lstStyle/>
-          <a:p>
-            <a:r>
-              <a:rPr lang="zh-TW" altLang="en-US" sz="4000" b="1" dirty="0">
-                <a:latin typeface="Microsoft JhengHei" pitchFamily="34" charset="-120"/>
-                <a:ea typeface="Microsoft JhengHei" pitchFamily="34" charset="-120"/>
-              </a:rPr>
-              <a:t>最知心的朋友</a:t>
-            </a:r>
-            <a:endParaRPr lang="en-US" sz="4000" b="1" dirty="0">
-              <a:latin typeface="Microsoft JhengHei" pitchFamily="34" charset="-120"/>
-              <a:ea typeface="Microsoft JhengHei" pitchFamily="34" charset="-120"/>
-            </a:endParaRPr>
-          </a:p>
-        </p:txBody>
-      </p:sp>
-      <p:sp>
-        <p:nvSpPr>
-          <p:cNvPr id="3" name="Content Placeholder 2"/>
-          <p:cNvSpPr>
-            <a:spLocks noGrp="1"/>
-          </p:cNvSpPr>
-          <p:nvPr>
-            <p:ph idx="1"/>
-          </p:nvPr>
-        </p:nvSpPr>
-        <p:spPr/>
+        <p:spPr>
+          <a:xfrm>
+            <a:off x="0" y="1995686"/>
+            <a:ext cx="9144000" cy="857250"/>
+          </a:xfrm>
+        </p:spPr>
         <p:txBody>
           <a:bodyPr>
             <a:noAutofit/>
           </a:bodyPr>
           <a:lstStyle/>
           <a:p>
-            <a:pPr marL="0" indent="0" algn="ctr">
-              <a:buNone/>
-            </a:pPr>
-            <a:r>
-              <a:rPr lang="zh-TW" altLang="en-US" sz="4800" b="1" dirty="0" smtClean="0">
-                <a:latin typeface="Microsoft JhengHei" pitchFamily="34" charset="-120"/>
-                <a:ea typeface="Microsoft JhengHei" pitchFamily="34" charset="-120"/>
+            <a:r>
+              <a:rPr lang="zh-TW" altLang="en-US" sz="5400" b="1" i="1" dirty="0">
+                <a:solidFill>
+                  <a:srgbClr val="660033"/>
+                </a:solidFill>
+                <a:effectLst>
+                  <a:outerShdw blurRad="38100" dist="38100" dir="2700000" algn="tl">
+                    <a:srgbClr val="000000">
+                      <a:alpha val="43137"/>
+                    </a:srgbClr>
+                  </a:outerShdw>
+                </a:effectLst>
+                <a:latin typeface="微軟正黑體" pitchFamily="34" charset="-120"/>
+                <a:ea typeface="微軟正黑體" pitchFamily="34" charset="-120"/>
               </a:rPr>
-              <a:t>主祢是</a:t>
-            </a:r>
-            <a:r>
-              <a:rPr lang="zh-TW" altLang="en-US" sz="4800" b="1" dirty="0">
-                <a:latin typeface="Microsoft JhengHei" pitchFamily="34" charset="-120"/>
-                <a:ea typeface="Microsoft JhengHei" pitchFamily="34" charset="-120"/>
-              </a:rPr>
-              <a:t>我最知心的朋友</a:t>
-            </a:r>
-            <a:endParaRPr lang="en-US" sz="4800" b="1" dirty="0">
-              <a:latin typeface="Microsoft JhengHei" pitchFamily="34" charset="-120"/>
-              <a:ea typeface="Microsoft JhengHei" pitchFamily="34" charset="-120"/>
-            </a:endParaRPr>
-          </a:p>
-          <a:p>
-            <a:pPr marL="0" indent="0" algn="ctr">
-              <a:buNone/>
-            </a:pPr>
-            <a:r>
-              <a:rPr lang="zh-TW" altLang="en-US" sz="4800" b="1" dirty="0" smtClean="0">
-                <a:latin typeface="Microsoft JhengHei" pitchFamily="34" charset="-120"/>
-                <a:ea typeface="Microsoft JhengHei" pitchFamily="34" charset="-120"/>
-              </a:rPr>
-              <a:t>主祢是</a:t>
-            </a:r>
-            <a:r>
-              <a:rPr lang="zh-TW" altLang="en-US" sz="4800" b="1" dirty="0">
-                <a:latin typeface="Microsoft JhengHei" pitchFamily="34" charset="-120"/>
-                <a:ea typeface="Microsoft JhengHei" pitchFamily="34" charset="-120"/>
-              </a:rPr>
-              <a:t>我最親愛的伴侶</a:t>
-            </a:r>
-            <a:endParaRPr lang="en-US" sz="4800" b="1" dirty="0">
-              <a:latin typeface="Microsoft JhengHei" pitchFamily="34" charset="-120"/>
-              <a:ea typeface="Microsoft JhengHei" pitchFamily="34" charset="-120"/>
-            </a:endParaRPr>
-          </a:p>
-          <a:p>
-            <a:pPr marL="0" indent="0" algn="ctr">
-              <a:buNone/>
-            </a:pPr>
-            <a:r>
-              <a:rPr lang="zh-TW" altLang="en-US" sz="4800" b="1" dirty="0">
-                <a:latin typeface="Microsoft JhengHei" pitchFamily="34" charset="-120"/>
-                <a:ea typeface="Microsoft JhengHei" pitchFamily="34" charset="-120"/>
-              </a:rPr>
-              <a:t>我的心在天天追想</a:t>
-            </a:r>
-            <a:r>
-              <a:rPr lang="zh-TW" altLang="en-US" sz="4800" b="1" dirty="0" smtClean="0">
-                <a:latin typeface="Microsoft JhengHei" pitchFamily="34" charset="-120"/>
-                <a:ea typeface="Microsoft JhengHei" pitchFamily="34" charset="-120"/>
-              </a:rPr>
-              <a:t>著祢</a:t>
-            </a:r>
-            <a:endParaRPr lang="en-US" sz="4800" b="1" dirty="0">
-              <a:latin typeface="Microsoft JhengHei" pitchFamily="34" charset="-120"/>
-              <a:ea typeface="Microsoft JhengHei" pitchFamily="34" charset="-120"/>
-            </a:endParaRPr>
-          </a:p>
-          <a:p>
-            <a:pPr marL="0" indent="0" algn="ctr">
-              <a:buNone/>
-            </a:pPr>
-            <a:r>
-              <a:rPr lang="zh-TW" altLang="en-US" sz="4800" b="1" dirty="0">
-                <a:latin typeface="Microsoft JhengHei" pitchFamily="34" charset="-120"/>
-                <a:ea typeface="Microsoft JhengHei" pitchFamily="34" charset="-120"/>
-              </a:rPr>
-              <a:t>渴望見</a:t>
-            </a:r>
-            <a:r>
-              <a:rPr lang="zh-TW" altLang="en-US" sz="4800" b="1" dirty="0" smtClean="0">
-                <a:latin typeface="Microsoft JhengHei" pitchFamily="34" charset="-120"/>
-                <a:ea typeface="Microsoft JhengHei" pitchFamily="34" charset="-120"/>
-              </a:rPr>
-              <a:t>到祢的</a:t>
-            </a:r>
-            <a:r>
-              <a:rPr lang="zh-TW" altLang="en-US" sz="4800" b="1" dirty="0">
-                <a:latin typeface="Microsoft JhengHei" pitchFamily="34" charset="-120"/>
-                <a:ea typeface="Microsoft JhengHei" pitchFamily="34" charset="-120"/>
-              </a:rPr>
-              <a:t>面</a:t>
-            </a:r>
-            <a:endParaRPr lang="en-US" sz="4800" b="1" dirty="0">
-              <a:latin typeface="Microsoft JhengHei" pitchFamily="34" charset="-120"/>
-              <a:ea typeface="Microsoft JhengHei" pitchFamily="34" charset="-120"/>
-            </a:endParaRPr>
+              <a:t>最知心的朋友</a:t>
+            </a:r>
           </a:p>
         </p:txBody>
       </p:sp>
     </p:spTree>
-    <p:extLst>
-      <p:ext uri="{BB962C8B-B14F-4D97-AF65-F5344CB8AC3E}">
-        <p14:creationId xmlns:p14="http://schemas.microsoft.com/office/powerpoint/2010/main" val="2621583914"/>
-      </p:ext>
-    </p:extLst>
   </p:cSld>
   <p:clrMapOvr>
     <a:masterClrMapping/>
@@ -3243,156 +3135,72 @@
       </p:grpSpPr>
       <p:sp>
         <p:nvSpPr>
-          <p:cNvPr id="2" name="Title 1"/>
-          <p:cNvSpPr>
-            <a:spLocks noGrp="1"/>
-          </p:cNvSpPr>
-          <p:nvPr>
-            <p:ph type="title"/>
-          </p:nvPr>
-        </p:nvSpPr>
-        <p:spPr/>
-        <p:txBody>
-          <a:bodyPr/>
-          <a:lstStyle/>
-          <a:p>
-            <a:r>
-              <a:rPr lang="zh-TW" altLang="en-US" sz="4000" b="1" dirty="0">
-                <a:latin typeface="Microsoft JhengHei" pitchFamily="34" charset="-120"/>
-                <a:ea typeface="Microsoft JhengHei" pitchFamily="34" charset="-120"/>
+          <p:cNvPr id="5" name="內容版面配置區 4"/>
+          <p:cNvSpPr>
+            <a:spLocks noGrp="1"/>
+          </p:cNvSpPr>
+          <p:nvPr>
+            <p:ph idx="1"/>
+          </p:nvPr>
+        </p:nvSpPr>
+        <p:spPr>
+          <a:xfrm>
+            <a:off x="0" y="1563638"/>
+            <a:ext cx="9144000" cy="1803647"/>
+          </a:xfrm>
+        </p:spPr>
+        <p:txBody>
+          <a:bodyPr anchor="ctr">
+            <a:normAutofit/>
+          </a:bodyPr>
+          <a:lstStyle/>
+          <a:p>
+            <a:pPr marL="0" indent="0" algn="ctr">
+              <a:buNone/>
+            </a:pPr>
+            <a:r>
+              <a:rPr lang="zh-TW" altLang="en-US" sz="4800" b="1" dirty="0">
+                <a:solidFill>
+                  <a:srgbClr val="660033"/>
+                </a:solidFill>
+                <a:latin typeface="微軟正黑體" pitchFamily="34" charset="-120"/>
+                <a:ea typeface="微軟正黑體" pitchFamily="34" charset="-120"/>
               </a:rPr>
-              <a:t>最知心的朋友</a:t>
-            </a:r>
-            <a:endParaRPr lang="en-US" sz="4000" b="1" dirty="0">
-              <a:latin typeface="Microsoft JhengHei" pitchFamily="34" charset="-120"/>
-              <a:ea typeface="Microsoft JhengHei" pitchFamily="34" charset="-120"/>
+              <a:t>主祢是我最知心的朋友</a:t>
+            </a:r>
+            <a:endParaRPr lang="en-US" sz="4800" b="1" dirty="0">
+              <a:solidFill>
+                <a:srgbClr val="660033"/>
+              </a:solidFill>
+              <a:latin typeface="微軟正黑體" pitchFamily="34" charset="-120"/>
+              <a:ea typeface="微軟正黑體" pitchFamily="34" charset="-120"/>
             </a:endParaRPr>
           </a:p>
-        </p:txBody>
-      </p:sp>
-      <p:sp>
-        <p:nvSpPr>
-          <p:cNvPr id="3" name="Content Placeholder 2"/>
-          <p:cNvSpPr>
-            <a:spLocks noGrp="1"/>
-          </p:cNvSpPr>
-          <p:nvPr>
-            <p:ph idx="1"/>
-          </p:nvPr>
-        </p:nvSpPr>
-        <p:spPr/>
-        <p:txBody>
-          <a:bodyPr>
-            <a:noAutofit/>
-          </a:bodyPr>
-          <a:lstStyle/>
           <a:p>
             <a:pPr marL="0" indent="0" algn="ctr">
               <a:buNone/>
             </a:pPr>
             <a:r>
               <a:rPr lang="zh-TW" altLang="en-US" sz="4800" b="1" dirty="0">
-                <a:latin typeface="Microsoft JhengHei" pitchFamily="34" charset="-120"/>
-                <a:ea typeface="Microsoft JhengHei" pitchFamily="34" charset="-120"/>
+                <a:solidFill>
+                  <a:srgbClr val="660033"/>
+                </a:solidFill>
+                <a:latin typeface="微軟正黑體" pitchFamily="34" charset="-120"/>
+                <a:ea typeface="微軟正黑體" pitchFamily="34" charset="-120"/>
               </a:rPr>
-              <a:t>在我人生的每一個台階</a:t>
+              <a:t>主祢是我最親愛的伴侶</a:t>
             </a:r>
             <a:endParaRPr lang="en-US" sz="4800" b="1" dirty="0">
-              <a:latin typeface="Microsoft JhengHei" pitchFamily="34" charset="-120"/>
-              <a:ea typeface="Microsoft JhengHei" pitchFamily="34" charset="-120"/>
+              <a:solidFill>
+                <a:srgbClr val="660033"/>
+              </a:solidFill>
+              <a:latin typeface="微軟正黑體" pitchFamily="34" charset="-120"/>
+              <a:ea typeface="微軟正黑體" pitchFamily="34" charset="-120"/>
             </a:endParaRPr>
           </a:p>
-          <a:p>
-            <a:pPr marL="0" indent="0" algn="ctr">
-              <a:buNone/>
-            </a:pPr>
-            <a:r>
-              <a:rPr lang="zh-TW" altLang="en-US" sz="4800" b="1" dirty="0">
-                <a:latin typeface="Microsoft JhengHei" pitchFamily="34" charset="-120"/>
-                <a:ea typeface="Microsoft JhengHei" pitchFamily="34" charset="-120"/>
-              </a:rPr>
-              <a:t>在我人生的每一個小站</a:t>
-            </a:r>
-            <a:endParaRPr lang="en-US" sz="4800" b="1" dirty="0">
-              <a:latin typeface="Microsoft JhengHei" pitchFamily="34" charset="-120"/>
-              <a:ea typeface="Microsoft JhengHei" pitchFamily="34" charset="-120"/>
-            </a:endParaRPr>
-          </a:p>
-          <a:p>
-            <a:pPr marL="0" indent="0" algn="ctr">
-              <a:buNone/>
-            </a:pPr>
-            <a:r>
-              <a:rPr lang="zh-TW" altLang="en-US" sz="4800" b="1" dirty="0" smtClean="0">
-                <a:latin typeface="Microsoft JhengHei" pitchFamily="34" charset="-120"/>
-                <a:ea typeface="Microsoft JhengHei" pitchFamily="34" charset="-120"/>
-              </a:rPr>
-              <a:t>祢的</a:t>
-            </a:r>
-            <a:r>
-              <a:rPr lang="zh-TW" altLang="en-US" sz="4800" b="1" dirty="0">
-                <a:latin typeface="Microsoft JhengHei" pitchFamily="34" charset="-120"/>
-                <a:ea typeface="Microsoft JhengHei" pitchFamily="34" charset="-120"/>
-              </a:rPr>
-              <a:t>手總是在攙拉著我</a:t>
-            </a:r>
-            <a:endParaRPr lang="en-US" sz="4800" b="1" dirty="0">
-              <a:latin typeface="Microsoft JhengHei" pitchFamily="34" charset="-120"/>
-              <a:ea typeface="Microsoft JhengHei" pitchFamily="34" charset="-120"/>
-            </a:endParaRPr>
-          </a:p>
-          <a:p>
-            <a:pPr marL="0" indent="0" algn="ctr">
-              <a:buNone/>
-            </a:pPr>
-            <a:r>
-              <a:rPr lang="zh-TW" altLang="en-US" sz="4800" b="1" dirty="0">
-                <a:latin typeface="Microsoft JhengHei" pitchFamily="34" charset="-120"/>
-                <a:ea typeface="Microsoft JhengHei" pitchFamily="34" charset="-120"/>
-              </a:rPr>
-              <a:t>把我帶</a:t>
-            </a:r>
-            <a:r>
-              <a:rPr lang="zh-TW" altLang="en-US" sz="4800" b="1" dirty="0" smtClean="0">
-                <a:latin typeface="Microsoft JhengHei" pitchFamily="34" charset="-120"/>
-                <a:ea typeface="Microsoft JhengHei" pitchFamily="34" charset="-120"/>
-              </a:rPr>
-              <a:t>在</a:t>
-            </a:r>
-            <a:r>
-              <a:rPr lang="zh-CN" altLang="en-US" sz="4800" b="1" dirty="0" smtClean="0">
-                <a:latin typeface="Microsoft JhengHei" pitchFamily="34" charset="-120"/>
-                <a:ea typeface="Microsoft JhengHei" pitchFamily="34" charset="-120"/>
-              </a:rPr>
-              <a:t>祢</a:t>
-            </a:r>
-            <a:r>
-              <a:rPr lang="zh-TW" altLang="en-US" sz="4800" b="1" dirty="0" smtClean="0">
-                <a:latin typeface="Microsoft JhengHei" pitchFamily="34" charset="-120"/>
-                <a:ea typeface="Microsoft JhengHei" pitchFamily="34" charset="-120"/>
-              </a:rPr>
-              <a:t>身</a:t>
-            </a:r>
-            <a:r>
-              <a:rPr lang="zh-TW" altLang="en-US" sz="4800" b="1" dirty="0">
-                <a:latin typeface="Microsoft JhengHei" pitchFamily="34" charset="-120"/>
-                <a:ea typeface="Microsoft JhengHei" pitchFamily="34" charset="-120"/>
-              </a:rPr>
-              <a:t>邊</a:t>
-            </a:r>
-            <a:endParaRPr lang="en-US" sz="4800" b="1" dirty="0">
-              <a:latin typeface="Microsoft JhengHei" pitchFamily="34" charset="-120"/>
-              <a:ea typeface="Microsoft JhengHei" pitchFamily="34" charset="-120"/>
-            </a:endParaRPr>
-          </a:p>
         </p:txBody>
       </p:sp>
     </p:spTree>
-    <p:extLst>
-      <p:ext uri="{BB962C8B-B14F-4D97-AF65-F5344CB8AC3E}">
-        <p14:creationId xmlns:p14="http://schemas.microsoft.com/office/powerpoint/2010/main" val="2514790298"/>
-      </p:ext>
-    </p:extLst>
   </p:cSld>
   <p:clrMapOvr>
     <a:masterClrMapping/>
@@ -3419,135 +3227,67 @@
       </p:grpSpPr>
       <p:sp>
         <p:nvSpPr>
-          <p:cNvPr id="2" name="Title 1"/>
-          <p:cNvSpPr>
-            <a:spLocks noGrp="1"/>
-          </p:cNvSpPr>
-          <p:nvPr>
-            <p:ph type="title"/>
-          </p:nvPr>
-        </p:nvSpPr>
-        <p:spPr/>
-        <p:txBody>
-          <a:bodyPr>
+          <p:cNvPr id="5" name="內容版面配置區 4"/>
+          <p:cNvSpPr>
+            <a:spLocks noGrp="1"/>
+          </p:cNvSpPr>
+          <p:nvPr>
+            <p:ph idx="1"/>
+          </p:nvPr>
+        </p:nvSpPr>
+        <p:spPr>
+          <a:xfrm>
+            <a:off x="0" y="1563638"/>
+            <a:ext cx="9144000" cy="1803647"/>
+          </a:xfrm>
+        </p:spPr>
+        <p:txBody>
+          <a:bodyPr anchor="ctr">
             <a:normAutofit/>
           </a:bodyPr>
           <a:lstStyle/>
           <a:p>
-            <a:r>
-              <a:rPr lang="zh-TW" altLang="en-US" sz="4000" b="1" dirty="0">
-                <a:latin typeface="Microsoft JhengHei" pitchFamily="34" charset="-120"/>
-                <a:ea typeface="Microsoft JhengHei" pitchFamily="34" charset="-120"/>
+            <a:pPr marL="0" indent="0" algn="ctr">
+              <a:buNone/>
+            </a:pPr>
+            <a:r>
+              <a:rPr lang="zh-TW" altLang="en-US" sz="4800" b="1" dirty="0">
+                <a:solidFill>
+                  <a:srgbClr val="660033"/>
+                </a:solidFill>
+                <a:latin typeface="微軟正黑體" pitchFamily="34" charset="-120"/>
+                <a:ea typeface="微軟正黑體" pitchFamily="34" charset="-120"/>
               </a:rPr>
-              <a:t>最知心的朋友</a:t>
-            </a:r>
-            <a:endParaRPr lang="en-US" sz="4000" b="1" dirty="0">
-              <a:latin typeface="Microsoft JhengHei" pitchFamily="34" charset="-120"/>
-              <a:ea typeface="Microsoft JhengHei" pitchFamily="34" charset="-120"/>
+              <a:t>我的心在天天追想著祢</a:t>
+            </a:r>
+            <a:endParaRPr lang="en-US" sz="4800" b="1" dirty="0">
+              <a:solidFill>
+                <a:srgbClr val="660033"/>
+              </a:solidFill>
+              <a:latin typeface="微軟正黑體" pitchFamily="34" charset="-120"/>
+              <a:ea typeface="微軟正黑體" pitchFamily="34" charset="-120"/>
             </a:endParaRPr>
           </a:p>
-        </p:txBody>
-      </p:sp>
-      <p:sp>
-        <p:nvSpPr>
-          <p:cNvPr id="3" name="Content Placeholder 2"/>
-          <p:cNvSpPr>
-            <a:spLocks noGrp="1"/>
-          </p:cNvSpPr>
-          <p:nvPr>
-            <p:ph idx="1"/>
-          </p:nvPr>
-        </p:nvSpPr>
-        <p:spPr>
-          <a:xfrm>
-            <a:off x="0" y="1200151"/>
-            <a:ext cx="9144000" cy="3394472"/>
-          </a:xfrm>
-        </p:spPr>
-        <p:txBody>
-          <a:bodyPr>
-            <a:noAutofit/>
-          </a:bodyPr>
-          <a:lstStyle/>
           <a:p>
             <a:pPr marL="0" indent="0" algn="ctr">
               <a:buNone/>
             </a:pPr>
             <a:r>
               <a:rPr lang="zh-TW" altLang="en-US" sz="4800" b="1" dirty="0">
-                <a:latin typeface="Microsoft JhengHei" pitchFamily="34" charset="-120"/>
-                <a:ea typeface="Microsoft JhengHei" pitchFamily="34" charset="-120"/>
+                <a:solidFill>
+                  <a:srgbClr val="660033"/>
+                </a:solidFill>
+                <a:latin typeface="微軟正黑體" pitchFamily="34" charset="-120"/>
+                <a:ea typeface="微軟正黑體" pitchFamily="34" charset="-120"/>
               </a:rPr>
-              <a:t>告訴我當走的路</a:t>
-            </a:r>
-            <a:r>
-              <a:rPr lang="en-US" altLang="zh-TW" sz="4800" b="1" dirty="0">
-                <a:latin typeface="Microsoft JhengHei" pitchFamily="34" charset="-120"/>
-                <a:ea typeface="Microsoft JhengHei" pitchFamily="34" charset="-120"/>
-              </a:rPr>
-              <a:t>  </a:t>
-            </a:r>
-          </a:p>
-          <a:p>
-            <a:pPr marL="0" indent="0" algn="ctr">
-              <a:buNone/>
-            </a:pPr>
-            <a:r>
-              <a:rPr lang="zh-TW" altLang="en-US" sz="4800" b="1" dirty="0">
-                <a:latin typeface="Microsoft JhengHei" pitchFamily="34" charset="-120"/>
-                <a:ea typeface="Microsoft JhengHei" pitchFamily="34" charset="-120"/>
-              </a:rPr>
-              <a:t>沒有滑向死亡線</a:t>
+              <a:t>渴望見到祢的面</a:t>
             </a:r>
             <a:endParaRPr lang="en-US" sz="4800" b="1" dirty="0">
-              <a:latin typeface="Microsoft JhengHei" pitchFamily="34" charset="-120"/>
-              <a:ea typeface="Microsoft JhengHei" pitchFamily="34" charset="-120"/>
-            </a:endParaRPr>
-          </a:p>
-          <a:p>
-            <a:pPr marL="0" indent="0" algn="ctr">
-              <a:buNone/>
-            </a:pPr>
-            <a:r>
-              <a:rPr lang="zh-CN" altLang="en-US" sz="4800" b="1" dirty="0" smtClean="0">
-                <a:latin typeface="Microsoft JhengHei" pitchFamily="34" charset="-120"/>
-                <a:ea typeface="Microsoft JhengHei" pitchFamily="34" charset="-120"/>
-              </a:rPr>
-              <a:t>祢</a:t>
-            </a:r>
-            <a:r>
-              <a:rPr lang="zh-TW" altLang="en-US" sz="4800" b="1" dirty="0" smtClean="0">
-                <a:latin typeface="Microsoft JhengHei" pitchFamily="34" charset="-120"/>
-                <a:ea typeface="Microsoft JhengHei" pitchFamily="34" charset="-120"/>
-              </a:rPr>
-              <a:t>愛</a:t>
-            </a:r>
-            <a:r>
-              <a:rPr lang="zh-TW" altLang="en-US" sz="4800" b="1" dirty="0">
-                <a:latin typeface="Microsoft JhengHei" pitchFamily="34" charset="-120"/>
-                <a:ea typeface="Microsoft JhengHei" pitchFamily="34" charset="-120"/>
-              </a:rPr>
-              <a:t>何等的長闊深高</a:t>
-            </a:r>
-            <a:endParaRPr lang="en-US" altLang="zh-TW" sz="4800" b="1" dirty="0">
-              <a:latin typeface="Microsoft JhengHei" pitchFamily="34" charset="-120"/>
-              <a:ea typeface="Microsoft JhengHei" pitchFamily="34" charset="-120"/>
-            </a:endParaRPr>
-          </a:p>
-          <a:p>
-            <a:pPr marL="0" indent="0" algn="ctr">
-              <a:buNone/>
-            </a:pPr>
-            <a:r>
-              <a:rPr lang="zh-TW" altLang="en-US" sz="4800" b="1" dirty="0">
-                <a:latin typeface="Microsoft JhengHei" pitchFamily="34" charset="-120"/>
-                <a:ea typeface="Microsoft JhengHei" pitchFamily="34" charset="-120"/>
-              </a:rPr>
-              <a:t>我心發出驚嘆</a:t>
-            </a:r>
-            <a:endParaRPr lang="en-US" sz="4800" b="1" dirty="0">
-              <a:latin typeface="Microsoft JhengHei" pitchFamily="34" charset="-120"/>
-              <a:ea typeface="Microsoft JhengHei" pitchFamily="34" charset="-120"/>
+              <a:solidFill>
+                <a:srgbClr val="660033"/>
+              </a:solidFill>
+              <a:latin typeface="微軟正黑體" pitchFamily="34" charset="-120"/>
+              <a:ea typeface="微軟正黑體" pitchFamily="34" charset="-120"/>
             </a:endParaRPr>
           </a:p>
         </p:txBody>
@@ -3555,7 +3295,7 @@
     </p:spTree>
     <p:extLst>
       <p:ext uri="{BB962C8B-B14F-4D97-AF65-F5344CB8AC3E}">
-        <p14:creationId xmlns:p14="http://schemas.microsoft.com/office/powerpoint/2010/main" val="1784057546"/>
+        <p14:creationId xmlns:p14="http://schemas.microsoft.com/office/powerpoint/2010/main" val="3943697766"/>
       </p:ext>
     </p:extLst>
   </p:cSld>
@@ -3584,118 +3324,67 @@
       </p:grpSpPr>
       <p:sp>
         <p:nvSpPr>
-          <p:cNvPr id="2" name="Title 1"/>
-          <p:cNvSpPr>
-            <a:spLocks noGrp="1"/>
-          </p:cNvSpPr>
-          <p:nvPr>
-            <p:ph type="title"/>
-          </p:nvPr>
-        </p:nvSpPr>
-        <p:spPr/>
-        <p:txBody>
-          <a:bodyPr>
+          <p:cNvPr id="5" name="內容版面配置區 4"/>
+          <p:cNvSpPr>
+            <a:spLocks noGrp="1"/>
+          </p:cNvSpPr>
+          <p:nvPr>
+            <p:ph idx="1"/>
+          </p:nvPr>
+        </p:nvSpPr>
+        <p:spPr>
+          <a:xfrm>
+            <a:off x="0" y="1563638"/>
+            <a:ext cx="9144000" cy="1803647"/>
+          </a:xfrm>
+        </p:spPr>
+        <p:txBody>
+          <a:bodyPr anchor="ctr">
             <a:normAutofit/>
           </a:bodyPr>
           <a:lstStyle/>
           <a:p>
-            <a:r>
-              <a:rPr lang="zh-TW" altLang="en-US" sz="4000" b="1" dirty="0">
-                <a:latin typeface="Microsoft JhengHei" pitchFamily="34" charset="-120"/>
-                <a:ea typeface="Microsoft JhengHei" pitchFamily="34" charset="-120"/>
+            <a:pPr marL="0" indent="0" algn="ctr">
+              <a:buNone/>
+            </a:pPr>
+            <a:r>
+              <a:rPr lang="zh-TW" altLang="en-US" sz="4800" b="1" dirty="0">
+                <a:solidFill>
+                  <a:srgbClr val="660033"/>
+                </a:solidFill>
+                <a:latin typeface="微軟正黑體" pitchFamily="34" charset="-120"/>
+                <a:ea typeface="微軟正黑體" pitchFamily="34" charset="-120"/>
               </a:rPr>
-              <a:t>最知心的朋友</a:t>
-            </a:r>
-            <a:endParaRPr lang="en-US" sz="4000" b="1" dirty="0">
-              <a:latin typeface="Microsoft JhengHei" pitchFamily="34" charset="-120"/>
-              <a:ea typeface="Microsoft JhengHei" pitchFamily="34" charset="-120"/>
+              <a:t>在我人生的每一個台階</a:t>
+            </a:r>
+            <a:endParaRPr lang="en-US" sz="4800" b="1" dirty="0">
+              <a:solidFill>
+                <a:srgbClr val="660033"/>
+              </a:solidFill>
+              <a:latin typeface="微軟正黑體" pitchFamily="34" charset="-120"/>
+              <a:ea typeface="微軟正黑體" pitchFamily="34" charset="-120"/>
             </a:endParaRPr>
           </a:p>
-        </p:txBody>
-      </p:sp>
-      <p:sp>
-        <p:nvSpPr>
-          <p:cNvPr id="3" name="Content Placeholder 2"/>
-          <p:cNvSpPr>
-            <a:spLocks noGrp="1"/>
-          </p:cNvSpPr>
-          <p:nvPr>
-            <p:ph idx="1"/>
-          </p:nvPr>
-        </p:nvSpPr>
-        <p:spPr>
-          <a:xfrm>
-            <a:off x="0" y="1200151"/>
-            <a:ext cx="9144000" cy="3394472"/>
-          </a:xfrm>
-        </p:spPr>
-        <p:txBody>
-          <a:bodyPr>
-            <a:noAutofit/>
-          </a:bodyPr>
-          <a:lstStyle/>
           <a:p>
             <a:pPr marL="0" indent="0" algn="ctr">
               <a:buNone/>
             </a:pPr>
             <a:r>
               <a:rPr lang="zh-TW" altLang="en-US" sz="4800" b="1" dirty="0">
-                <a:latin typeface="Microsoft JhengHei" pitchFamily="34" charset="-120"/>
-                <a:ea typeface="Microsoft JhengHei" pitchFamily="34" charset="-120"/>
+                <a:solidFill>
+                  <a:srgbClr val="660033"/>
+                </a:solidFill>
+                <a:latin typeface="微軟正黑體" pitchFamily="34" charset="-120"/>
+                <a:ea typeface="微軟正黑體" pitchFamily="34" charset="-120"/>
               </a:rPr>
-              <a:t>有了主還要什麼</a:t>
+              <a:t>在我人生的每一個小站</a:t>
             </a:r>
             <a:endParaRPr lang="en-US" sz="4800" b="1" dirty="0">
-              <a:latin typeface="Microsoft JhengHei" pitchFamily="34" charset="-120"/>
-              <a:ea typeface="Microsoft JhengHei" pitchFamily="34" charset="-120"/>
-            </a:endParaRPr>
-          </a:p>
-          <a:p>
-            <a:pPr marL="0" indent="0" algn="ctr">
-              <a:buNone/>
-            </a:pPr>
-            <a:r>
-              <a:rPr lang="zh-TW" altLang="en-US" sz="4800" b="1" dirty="0">
-                <a:latin typeface="Microsoft JhengHei" pitchFamily="34" charset="-120"/>
-                <a:ea typeface="Microsoft JhengHei" pitchFamily="34" charset="-120"/>
-              </a:rPr>
-              <a:t>我心與主心相連</a:t>
-            </a:r>
-            <a:endParaRPr lang="en-US" sz="4800" b="1" dirty="0">
-              <a:latin typeface="Microsoft JhengHei" pitchFamily="34" charset="-120"/>
-              <a:ea typeface="Microsoft JhengHei" pitchFamily="34" charset="-120"/>
-            </a:endParaRPr>
-          </a:p>
-          <a:p>
-            <a:pPr marL="0" indent="0" algn="ctr">
-              <a:buNone/>
-            </a:pPr>
-            <a:r>
-              <a:rPr lang="zh-TW" altLang="en-US" sz="4800" b="1" dirty="0">
-                <a:latin typeface="Microsoft JhengHei" pitchFamily="34" charset="-120"/>
-                <a:ea typeface="Microsoft JhengHei" pitchFamily="34" charset="-120"/>
-              </a:rPr>
-              <a:t>我已起誓要跟隨主</a:t>
-            </a:r>
-            <a:endParaRPr lang="en-US" sz="4800" b="1" dirty="0">
-              <a:latin typeface="Microsoft JhengHei" pitchFamily="34" charset="-120"/>
-              <a:ea typeface="Microsoft JhengHei" pitchFamily="34" charset="-120"/>
-            </a:endParaRPr>
-          </a:p>
-          <a:p>
-            <a:pPr marL="0" indent="0" algn="ctr">
-              <a:buNone/>
-            </a:pPr>
-            <a:r>
-              <a:rPr lang="zh-TW" altLang="en-US" sz="4800" b="1" dirty="0">
-                <a:latin typeface="Microsoft JhengHei" pitchFamily="34" charset="-120"/>
-                <a:ea typeface="Microsoft JhengHei" pitchFamily="34" charset="-120"/>
-              </a:rPr>
-              <a:t>永不改變</a:t>
-            </a:r>
-            <a:endParaRPr lang="en-US" sz="4800" b="1" dirty="0">
-              <a:latin typeface="Microsoft JhengHei" pitchFamily="34" charset="-120"/>
-              <a:ea typeface="Microsoft JhengHei" pitchFamily="34" charset="-120"/>
+              <a:solidFill>
+                <a:srgbClr val="660033"/>
+              </a:solidFill>
+              <a:latin typeface="微軟正黑體" pitchFamily="34" charset="-120"/>
+              <a:ea typeface="微軟正黑體" pitchFamily="34" charset="-120"/>
             </a:endParaRPr>
           </a:p>
         </p:txBody>
@@ -3703,7 +3392,525 @@
     </p:spTree>
     <p:extLst>
       <p:ext uri="{BB962C8B-B14F-4D97-AF65-F5344CB8AC3E}">
-        <p14:creationId xmlns:p14="http://schemas.microsoft.com/office/powerpoint/2010/main" val="3000239804"/>
+        <p14:creationId xmlns:p14="http://schemas.microsoft.com/office/powerpoint/2010/main" val="2496940152"/>
+      </p:ext>
+    </p:extLst>
+  </p:cSld>
+  <p:clrMapOvr>
+    <a:masterClrMapping/>
+  </p:clrMapOvr>
+</p:sld>
+</file>
+
+<file path=ppt/slides/slide5.xml><?xml version="1.0" encoding="utf-8"?>
+<p:sld xmlns:a="http://schemas.openxmlformats.org/drawingml/2006/main" xmlns:r="http://schemas.openxmlformats.org/officeDocument/2006/relationships" xmlns:p="http://schemas.openxmlformats.org/presentationml/2006/main">
+  <p:cSld>
+    <p:spTree>
+      <p:nvGrpSpPr>
+        <p:cNvPr id="1" name=""/>
+        <p:cNvGrpSpPr/>
+        <p:nvPr/>
+      </p:nvGrpSpPr>
+      <p:grpSpPr>
+        <a:xfrm>
+          <a:off x="0" y="0"/>
+          <a:ext cx="0" cy="0"/>
+          <a:chOff x="0" y="0"/>
+          <a:chExt cx="0" cy="0"/>
+        </a:xfrm>
+      </p:grpSpPr>
+      <p:sp>
+        <p:nvSpPr>
+          <p:cNvPr id="5" name="內容版面配置區 4"/>
+          <p:cNvSpPr>
+            <a:spLocks noGrp="1"/>
+          </p:cNvSpPr>
+          <p:nvPr>
+            <p:ph idx="1"/>
+          </p:nvPr>
+        </p:nvSpPr>
+        <p:spPr>
+          <a:xfrm>
+            <a:off x="0" y="1563638"/>
+            <a:ext cx="9144000" cy="1803647"/>
+          </a:xfrm>
+        </p:spPr>
+        <p:txBody>
+          <a:bodyPr anchor="ctr">
+            <a:normAutofit/>
+          </a:bodyPr>
+          <a:lstStyle/>
+          <a:p>
+            <a:pPr marL="0" indent="0" algn="ctr">
+              <a:buNone/>
+            </a:pPr>
+            <a:r>
+              <a:rPr lang="zh-TW" altLang="en-US" sz="4800" b="1" dirty="0">
+                <a:solidFill>
+                  <a:srgbClr val="660033"/>
+                </a:solidFill>
+                <a:latin typeface="微軟正黑體" pitchFamily="34" charset="-120"/>
+                <a:ea typeface="微軟正黑體" pitchFamily="34" charset="-120"/>
+              </a:rPr>
+              <a:t>祢的手總是在攙拉著我</a:t>
+            </a:r>
+            <a:endParaRPr lang="en-US" sz="4800" b="1" dirty="0">
+              <a:solidFill>
+                <a:srgbClr val="660033"/>
+              </a:solidFill>
+              <a:latin typeface="微軟正黑體" pitchFamily="34" charset="-120"/>
+              <a:ea typeface="微軟正黑體" pitchFamily="34" charset="-120"/>
+            </a:endParaRPr>
+          </a:p>
+          <a:p>
+            <a:pPr marL="0" indent="0" algn="ctr">
+              <a:buNone/>
+            </a:pPr>
+            <a:r>
+              <a:rPr lang="zh-TW" altLang="en-US" sz="4800" b="1" dirty="0">
+                <a:solidFill>
+                  <a:srgbClr val="660033"/>
+                </a:solidFill>
+                <a:latin typeface="微軟正黑體" pitchFamily="34" charset="-120"/>
+                <a:ea typeface="微軟正黑體" pitchFamily="34" charset="-120"/>
+              </a:rPr>
+              <a:t>把我帶在</a:t>
+            </a:r>
+            <a:r>
+              <a:rPr lang="zh-CN" altLang="en-US" sz="4800" b="1" dirty="0">
+                <a:solidFill>
+                  <a:srgbClr val="660033"/>
+                </a:solidFill>
+                <a:latin typeface="微軟正黑體" pitchFamily="34" charset="-120"/>
+                <a:ea typeface="微軟正黑體" pitchFamily="34" charset="-120"/>
+              </a:rPr>
+              <a:t>祢</a:t>
+            </a:r>
+            <a:r>
+              <a:rPr lang="zh-TW" altLang="en-US" sz="4800" b="1" dirty="0">
+                <a:solidFill>
+                  <a:srgbClr val="660033"/>
+                </a:solidFill>
+                <a:latin typeface="微軟正黑體" pitchFamily="34" charset="-120"/>
+                <a:ea typeface="微軟正黑體" pitchFamily="34" charset="-120"/>
+              </a:rPr>
+              <a:t>身邊</a:t>
+            </a:r>
+            <a:endParaRPr lang="en-US" sz="4800" b="1" dirty="0">
+              <a:solidFill>
+                <a:srgbClr val="660033"/>
+              </a:solidFill>
+              <a:latin typeface="微軟正黑體" pitchFamily="34" charset="-120"/>
+              <a:ea typeface="微軟正黑體" pitchFamily="34" charset="-120"/>
+            </a:endParaRPr>
+          </a:p>
+        </p:txBody>
+      </p:sp>
+    </p:spTree>
+    <p:extLst>
+      <p:ext uri="{BB962C8B-B14F-4D97-AF65-F5344CB8AC3E}">
+        <p14:creationId xmlns:p14="http://schemas.microsoft.com/office/powerpoint/2010/main" val="1757108611"/>
+      </p:ext>
+    </p:extLst>
+  </p:cSld>
+  <p:clrMapOvr>
+    <a:masterClrMapping/>
+  </p:clrMapOvr>
+</p:sld>
+</file>
+
+<file path=ppt/slides/slide6.xml><?xml version="1.0" encoding="utf-8"?>
+<p:sld xmlns:a="http://schemas.openxmlformats.org/drawingml/2006/main" xmlns:r="http://schemas.openxmlformats.org/officeDocument/2006/relationships" xmlns:p="http://schemas.openxmlformats.org/presentationml/2006/main">
+  <p:cSld>
+    <p:spTree>
+      <p:nvGrpSpPr>
+        <p:cNvPr id="1" name=""/>
+        <p:cNvGrpSpPr/>
+        <p:nvPr/>
+      </p:nvGrpSpPr>
+      <p:grpSpPr>
+        <a:xfrm>
+          <a:off x="0" y="0"/>
+          <a:ext cx="0" cy="0"/>
+          <a:chOff x="0" y="0"/>
+          <a:chExt cx="0" cy="0"/>
+        </a:xfrm>
+      </p:grpSpPr>
+      <p:sp>
+        <p:nvSpPr>
+          <p:cNvPr id="5" name="內容版面配置區 4"/>
+          <p:cNvSpPr>
+            <a:spLocks noGrp="1"/>
+          </p:cNvSpPr>
+          <p:nvPr>
+            <p:ph idx="1"/>
+          </p:nvPr>
+        </p:nvSpPr>
+        <p:spPr>
+          <a:xfrm>
+            <a:off x="0" y="1563638"/>
+            <a:ext cx="9144000" cy="1803647"/>
+          </a:xfrm>
+        </p:spPr>
+        <p:txBody>
+          <a:bodyPr anchor="ctr">
+            <a:normAutofit/>
+          </a:bodyPr>
+          <a:lstStyle/>
+          <a:p>
+            <a:pPr marL="0" indent="0" algn="ctr">
+              <a:buNone/>
+            </a:pPr>
+            <a:r>
+              <a:rPr lang="zh-TW" altLang="en-US" sz="4800" b="1" dirty="0">
+                <a:solidFill>
+                  <a:srgbClr val="660033"/>
+                </a:solidFill>
+                <a:latin typeface="微軟正黑體" pitchFamily="34" charset="-120"/>
+                <a:ea typeface="微軟正黑體" pitchFamily="34" charset="-120"/>
+              </a:rPr>
+              <a:t>告訴我當走的路</a:t>
+            </a:r>
+            <a:r>
+              <a:rPr lang="en-US" altLang="zh-TW" sz="4800" b="1" dirty="0">
+                <a:solidFill>
+                  <a:srgbClr val="660033"/>
+                </a:solidFill>
+                <a:latin typeface="微軟正黑體" pitchFamily="34" charset="-120"/>
+                <a:ea typeface="微軟正黑體" pitchFamily="34" charset="-120"/>
+              </a:rPr>
+              <a:t>  </a:t>
+            </a:r>
+          </a:p>
+          <a:p>
+            <a:pPr marL="0" indent="0" algn="ctr">
+              <a:buNone/>
+            </a:pPr>
+            <a:r>
+              <a:rPr lang="zh-TW" altLang="en-US" sz="4800" b="1" dirty="0">
+                <a:solidFill>
+                  <a:srgbClr val="660033"/>
+                </a:solidFill>
+                <a:latin typeface="微軟正黑體" pitchFamily="34" charset="-120"/>
+                <a:ea typeface="微軟正黑體" pitchFamily="34" charset="-120"/>
+              </a:rPr>
+              <a:t>沒有滑向死亡線</a:t>
+            </a:r>
+            <a:endParaRPr lang="en-US" sz="4800" b="1" dirty="0">
+              <a:solidFill>
+                <a:srgbClr val="660033"/>
+              </a:solidFill>
+              <a:latin typeface="微軟正黑體" pitchFamily="34" charset="-120"/>
+              <a:ea typeface="微軟正黑體" pitchFamily="34" charset="-120"/>
+            </a:endParaRPr>
+          </a:p>
+        </p:txBody>
+      </p:sp>
+    </p:spTree>
+    <p:extLst>
+      <p:ext uri="{BB962C8B-B14F-4D97-AF65-F5344CB8AC3E}">
+        <p14:creationId xmlns:p14="http://schemas.microsoft.com/office/powerpoint/2010/main" val="2537877722"/>
+      </p:ext>
+    </p:extLst>
+  </p:cSld>
+  <p:clrMapOvr>
+    <a:masterClrMapping/>
+  </p:clrMapOvr>
+</p:sld>
+</file>
+
+<file path=ppt/slides/slide7.xml><?xml version="1.0" encoding="utf-8"?>
+<p:sld xmlns:a="http://schemas.openxmlformats.org/drawingml/2006/main" xmlns:r="http://schemas.openxmlformats.org/officeDocument/2006/relationships" xmlns:p="http://schemas.openxmlformats.org/presentationml/2006/main">
+  <p:cSld>
+    <p:spTree>
+      <p:nvGrpSpPr>
+        <p:cNvPr id="1" name=""/>
+        <p:cNvGrpSpPr/>
+        <p:nvPr/>
+      </p:nvGrpSpPr>
+      <p:grpSpPr>
+        <a:xfrm>
+          <a:off x="0" y="0"/>
+          <a:ext cx="0" cy="0"/>
+          <a:chOff x="0" y="0"/>
+          <a:chExt cx="0" cy="0"/>
+        </a:xfrm>
+      </p:grpSpPr>
+      <p:sp>
+        <p:nvSpPr>
+          <p:cNvPr id="5" name="內容版面配置區 4"/>
+          <p:cNvSpPr>
+            <a:spLocks noGrp="1"/>
+          </p:cNvSpPr>
+          <p:nvPr>
+            <p:ph idx="1"/>
+          </p:nvPr>
+        </p:nvSpPr>
+        <p:spPr>
+          <a:xfrm>
+            <a:off x="0" y="1563638"/>
+            <a:ext cx="9144000" cy="1803647"/>
+          </a:xfrm>
+        </p:spPr>
+        <p:txBody>
+          <a:bodyPr anchor="ctr">
+            <a:normAutofit/>
+          </a:bodyPr>
+          <a:lstStyle/>
+          <a:p>
+            <a:pPr marL="0" indent="0" algn="ctr">
+              <a:buNone/>
+            </a:pPr>
+            <a:r>
+              <a:rPr lang="zh-CN" altLang="en-US" sz="4800" b="1" dirty="0">
+                <a:solidFill>
+                  <a:srgbClr val="660033"/>
+                </a:solidFill>
+                <a:latin typeface="微軟正黑體" pitchFamily="34" charset="-120"/>
+                <a:ea typeface="微軟正黑體" pitchFamily="34" charset="-120"/>
+              </a:rPr>
+              <a:t>祢</a:t>
+            </a:r>
+            <a:r>
+              <a:rPr lang="zh-TW" altLang="en-US" sz="4800" b="1" dirty="0">
+                <a:solidFill>
+                  <a:srgbClr val="660033"/>
+                </a:solidFill>
+                <a:latin typeface="微軟正黑體" pitchFamily="34" charset="-120"/>
+                <a:ea typeface="微軟正黑體" pitchFamily="34" charset="-120"/>
+              </a:rPr>
+              <a:t>愛何等的長闊深高</a:t>
+            </a:r>
+            <a:endParaRPr lang="en-US" altLang="zh-TW" sz="4800" b="1" dirty="0">
+              <a:solidFill>
+                <a:srgbClr val="660033"/>
+              </a:solidFill>
+              <a:latin typeface="微軟正黑體" pitchFamily="34" charset="-120"/>
+              <a:ea typeface="微軟正黑體" pitchFamily="34" charset="-120"/>
+            </a:endParaRPr>
+          </a:p>
+          <a:p>
+            <a:pPr marL="0" indent="0" algn="ctr">
+              <a:buNone/>
+            </a:pPr>
+            <a:r>
+              <a:rPr lang="zh-TW" altLang="en-US" sz="4800" b="1" dirty="0">
+                <a:solidFill>
+                  <a:srgbClr val="660033"/>
+                </a:solidFill>
+                <a:latin typeface="微軟正黑體" pitchFamily="34" charset="-120"/>
+                <a:ea typeface="微軟正黑體" pitchFamily="34" charset="-120"/>
+              </a:rPr>
+              <a:t>我心發出驚嘆</a:t>
+            </a:r>
+            <a:endParaRPr lang="en-US" sz="4800" b="1" dirty="0">
+              <a:solidFill>
+                <a:srgbClr val="660033"/>
+              </a:solidFill>
+              <a:latin typeface="微軟正黑體" pitchFamily="34" charset="-120"/>
+              <a:ea typeface="微軟正黑體" pitchFamily="34" charset="-120"/>
+            </a:endParaRPr>
+          </a:p>
+        </p:txBody>
+      </p:sp>
+    </p:spTree>
+    <p:extLst>
+      <p:ext uri="{BB962C8B-B14F-4D97-AF65-F5344CB8AC3E}">
+        <p14:creationId xmlns:p14="http://schemas.microsoft.com/office/powerpoint/2010/main" val="3611483449"/>
+      </p:ext>
+    </p:extLst>
+  </p:cSld>
+  <p:clrMapOvr>
+    <a:masterClrMapping/>
+  </p:clrMapOvr>
+</p:sld>
+</file>
+
+<file path=ppt/slides/slide8.xml><?xml version="1.0" encoding="utf-8"?>
+<p:sld xmlns:a="http://schemas.openxmlformats.org/drawingml/2006/main" xmlns:r="http://schemas.openxmlformats.org/officeDocument/2006/relationships" xmlns:p="http://schemas.openxmlformats.org/presentationml/2006/main">
+  <p:cSld>
+    <p:spTree>
+      <p:nvGrpSpPr>
+        <p:cNvPr id="1" name=""/>
+        <p:cNvGrpSpPr/>
+        <p:nvPr/>
+      </p:nvGrpSpPr>
+      <p:grpSpPr>
+        <a:xfrm>
+          <a:off x="0" y="0"/>
+          <a:ext cx="0" cy="0"/>
+          <a:chOff x="0" y="0"/>
+          <a:chExt cx="0" cy="0"/>
+        </a:xfrm>
+      </p:grpSpPr>
+      <p:sp>
+        <p:nvSpPr>
+          <p:cNvPr id="5" name="內容版面配置區 4"/>
+          <p:cNvSpPr>
+            <a:spLocks noGrp="1"/>
+          </p:cNvSpPr>
+          <p:nvPr>
+            <p:ph idx="1"/>
+          </p:nvPr>
+        </p:nvSpPr>
+        <p:spPr>
+          <a:xfrm>
+            <a:off x="0" y="1563638"/>
+            <a:ext cx="9144000" cy="1803647"/>
+          </a:xfrm>
+        </p:spPr>
+        <p:txBody>
+          <a:bodyPr anchor="ctr">
+            <a:normAutofit/>
+          </a:bodyPr>
+          <a:lstStyle/>
+          <a:p>
+            <a:pPr marL="0" indent="0" algn="ctr">
+              <a:buNone/>
+            </a:pPr>
+            <a:r>
+              <a:rPr lang="zh-TW" altLang="en-US" sz="4800" b="1" dirty="0">
+                <a:solidFill>
+                  <a:srgbClr val="660033"/>
+                </a:solidFill>
+                <a:latin typeface="微軟正黑體" pitchFamily="34" charset="-120"/>
+                <a:ea typeface="微軟正黑體" pitchFamily="34" charset="-120"/>
+              </a:rPr>
+              <a:t>有了主還要什麼</a:t>
+            </a:r>
+            <a:endParaRPr lang="en-US" sz="4800" b="1" dirty="0">
+              <a:solidFill>
+                <a:srgbClr val="660033"/>
+              </a:solidFill>
+              <a:latin typeface="微軟正黑體" pitchFamily="34" charset="-120"/>
+              <a:ea typeface="微軟正黑體" pitchFamily="34" charset="-120"/>
+            </a:endParaRPr>
+          </a:p>
+          <a:p>
+            <a:pPr marL="0" indent="0" algn="ctr">
+              <a:buNone/>
+            </a:pPr>
+            <a:r>
+              <a:rPr lang="zh-TW" altLang="en-US" sz="4800" b="1" dirty="0">
+                <a:solidFill>
+                  <a:srgbClr val="660033"/>
+                </a:solidFill>
+                <a:latin typeface="微軟正黑體" pitchFamily="34" charset="-120"/>
+                <a:ea typeface="微軟正黑體" pitchFamily="34" charset="-120"/>
+              </a:rPr>
+              <a:t>我心與主心相連</a:t>
+            </a:r>
+            <a:endParaRPr lang="en-US" sz="4800" b="1" dirty="0">
+              <a:solidFill>
+                <a:srgbClr val="660033"/>
+              </a:solidFill>
+              <a:latin typeface="微軟正黑體" pitchFamily="34" charset="-120"/>
+              <a:ea typeface="微軟正黑體" pitchFamily="34" charset="-120"/>
+            </a:endParaRPr>
+          </a:p>
+        </p:txBody>
+      </p:sp>
+    </p:spTree>
+    <p:extLst>
+      <p:ext uri="{BB962C8B-B14F-4D97-AF65-F5344CB8AC3E}">
+        <p14:creationId xmlns:p14="http://schemas.microsoft.com/office/powerpoint/2010/main" val="875939599"/>
+      </p:ext>
+    </p:extLst>
+  </p:cSld>
+  <p:clrMapOvr>
+    <a:masterClrMapping/>
+  </p:clrMapOvr>
+</p:sld>
+</file>
+
+<file path=ppt/slides/slide9.xml><?xml version="1.0" encoding="utf-8"?>
+<p:sld xmlns:a="http://schemas.openxmlformats.org/drawingml/2006/main" xmlns:r="http://schemas.openxmlformats.org/officeDocument/2006/relationships" xmlns:p="http://schemas.openxmlformats.org/presentationml/2006/main">
+  <p:cSld>
+    <p:spTree>
+      <p:nvGrpSpPr>
+        <p:cNvPr id="1" name=""/>
+        <p:cNvGrpSpPr/>
+        <p:nvPr/>
+      </p:nvGrpSpPr>
+      <p:grpSpPr>
+        <a:xfrm>
+          <a:off x="0" y="0"/>
+          <a:ext cx="0" cy="0"/>
+          <a:chOff x="0" y="0"/>
+          <a:chExt cx="0" cy="0"/>
+        </a:xfrm>
+      </p:grpSpPr>
+      <p:sp>
+        <p:nvSpPr>
+          <p:cNvPr id="5" name="內容版面配置區 4"/>
+          <p:cNvSpPr>
+            <a:spLocks noGrp="1"/>
+          </p:cNvSpPr>
+          <p:nvPr>
+            <p:ph idx="1"/>
+          </p:nvPr>
+        </p:nvSpPr>
+        <p:spPr>
+          <a:xfrm>
+            <a:off x="0" y="1563638"/>
+            <a:ext cx="9144000" cy="1803647"/>
+          </a:xfrm>
+        </p:spPr>
+        <p:txBody>
+          <a:bodyPr anchor="ctr">
+            <a:normAutofit/>
+          </a:bodyPr>
+          <a:lstStyle/>
+          <a:p>
+            <a:pPr marL="0" indent="0" algn="ctr">
+              <a:buNone/>
+            </a:pPr>
+            <a:r>
+              <a:rPr lang="zh-TW" altLang="en-US" sz="4800" b="1" dirty="0">
+                <a:solidFill>
+                  <a:srgbClr val="660033"/>
+                </a:solidFill>
+                <a:latin typeface="微軟正黑體" pitchFamily="34" charset="-120"/>
+                <a:ea typeface="微軟正黑體" pitchFamily="34" charset="-120"/>
+              </a:rPr>
+              <a:t>我已起誓要跟隨主</a:t>
+            </a:r>
+            <a:endParaRPr lang="en-US" sz="4800" b="1" dirty="0">
+              <a:solidFill>
+                <a:srgbClr val="660033"/>
+              </a:solidFill>
+              <a:latin typeface="微軟正黑體" pitchFamily="34" charset="-120"/>
+              <a:ea typeface="微軟正黑體" pitchFamily="34" charset="-120"/>
+            </a:endParaRPr>
+          </a:p>
+          <a:p>
+            <a:pPr marL="0" indent="0" algn="ctr">
+              <a:buNone/>
+            </a:pPr>
+            <a:r>
+              <a:rPr lang="zh-TW" altLang="en-US" sz="4800" b="1" dirty="0">
+                <a:solidFill>
+                  <a:srgbClr val="660033"/>
+                </a:solidFill>
+                <a:latin typeface="微軟正黑體" pitchFamily="34" charset="-120"/>
+                <a:ea typeface="微軟正黑體" pitchFamily="34" charset="-120"/>
+              </a:rPr>
+              <a:t>永不改變</a:t>
+            </a:r>
+            <a:endParaRPr lang="en-US" sz="4800" b="1" dirty="0">
+              <a:solidFill>
+                <a:srgbClr val="660033"/>
+              </a:solidFill>
+              <a:latin typeface="微軟正黑體" pitchFamily="34" charset="-120"/>
+              <a:ea typeface="微軟正黑體" pitchFamily="34" charset="-120"/>
+            </a:endParaRPr>
+          </a:p>
+        </p:txBody>
+      </p:sp>
+    </p:spTree>
+    <p:extLst>
+      <p:ext uri="{BB962C8B-B14F-4D97-AF65-F5344CB8AC3E}">
+        <p14:creationId xmlns:p14="http://schemas.microsoft.com/office/powerpoint/2010/main" val="457218475"/>
       </p:ext>
     </p:extLst>
   </p:cSld>
